--- a/entregas/posts/site/kit/editavel/efeito-rebote-sex-23-10.pptx
+++ b/entregas/posts/site/kit/editavel/efeito-rebote-sex-23-10.pptx
@@ -3933,7 +3933,7 @@
         </p:nvSpPr>
         <p:spPr>
           <a:xfrm>
-            <a:off x="915442" y="4856205"/>
+            <a:off x="915442" y="4795306"/>
             <a:ext cx="2278440" cy="304495"/>
           </a:xfrm>
           <a:prstGeom prst="rect">
@@ -3959,13 +3959,13 @@
               </a:spcAft>
             </a:pPr>
             <a:r>
-              <a:rPr b="0" i="0" sz="2397" lang="pt-BR">
+              <a:rPr b="1" i="0" sz="2397" lang="pt-BR">
                 <a:solidFill>
                   <a:srgbClr val="E9C46A"/>
                 </a:solidFill>
-                <a:latin typeface="Barlow SemiBold"/>
-                <a:ea typeface="Barlow SemiBold"/>
-                <a:cs typeface="Barlow SemiBold"/>
+                <a:latin typeface="Barlow"/>
+                <a:ea typeface="Barlow"/>
+                <a:cs typeface="Barlow"/>
               </a:rPr>
               <a:t>0 a 3 s · gancho</a:t>
             </a:r>
@@ -3980,7 +3980,7 @@
         </p:nvSpPr>
         <p:spPr>
           <a:xfrm>
-            <a:off x="915442" y="5611651"/>
+            <a:off x="915442" y="5335550"/>
             <a:ext cx="8637627" cy="3689747"/>
           </a:xfrm>
           <a:prstGeom prst="rect">
@@ -4051,7 +4051,7 @@
         </p:nvSpPr>
         <p:spPr>
           <a:xfrm>
-            <a:off x="915442" y="11515488"/>
+            <a:off x="915442" y="11496457"/>
             <a:ext cx="1210717" cy="437712"/>
           </a:xfrm>
           <a:prstGeom prst="rect">
@@ -4266,7 +4266,7 @@
         </p:nvSpPr>
         <p:spPr>
           <a:xfrm>
-            <a:off x="915442" y="1079840"/>
+            <a:off x="915442" y="1018941"/>
             <a:ext cx="2634020" cy="304495"/>
           </a:xfrm>
           <a:prstGeom prst="rect">
@@ -4292,13 +4292,13 @@
               </a:spcAft>
             </a:pPr>
             <a:r>
-              <a:rPr b="0" i="0" sz="2397" lang="pt-BR">
+              <a:rPr b="1" i="0" sz="2397" lang="pt-BR">
                 <a:solidFill>
                   <a:srgbClr val="B5121B"/>
                 </a:solidFill>
-                <a:latin typeface="Barlow SemiBold"/>
-                <a:ea typeface="Barlow SemiBold"/>
-                <a:cs typeface="Barlow SemiBold"/>
+                <a:latin typeface="Barlow"/>
+                <a:ea typeface="Barlow"/>
+                <a:cs typeface="Barlow"/>
               </a:rPr>
               <a:t>3 a 10 s · contexto</a:t>
             </a:r>
@@ -4313,7 +4313,7 @@
         </p:nvSpPr>
         <p:spPr>
           <a:xfrm>
-            <a:off x="915442" y="5295723"/>
+            <a:off x="915442" y="5086155"/>
             <a:ext cx="7677626" cy="2800573"/>
           </a:xfrm>
           <a:prstGeom prst="rect">
@@ -4528,7 +4528,7 @@
         </p:nvSpPr>
         <p:spPr>
           <a:xfrm>
-            <a:off x="915442" y="1079840"/>
+            <a:off x="915442" y="1018941"/>
             <a:ext cx="3186872" cy="304495"/>
           </a:xfrm>
           <a:prstGeom prst="rect">
@@ -4554,13 +4554,13 @@
               </a:spcAft>
             </a:pPr>
             <a:r>
-              <a:rPr b="0" i="0" sz="2397" lang="pt-BR">
+              <a:rPr b="1" i="0" sz="2397" lang="pt-BR">
                 <a:solidFill>
                   <a:srgbClr val="B5121B"/>
                 </a:solidFill>
-                <a:latin typeface="Barlow SemiBold"/>
-                <a:ea typeface="Barlow SemiBold"/>
-                <a:cs typeface="Barlow SemiBold"/>
+                <a:latin typeface="Barlow"/>
+                <a:ea typeface="Barlow"/>
+                <a:cs typeface="Barlow"/>
               </a:rPr>
               <a:t>10 a 22 s · informação</a:t>
             </a:r>
@@ -4575,7 +4575,7 @@
         </p:nvSpPr>
         <p:spPr>
           <a:xfrm>
-            <a:off x="915442" y="5296169"/>
+            <a:off x="915442" y="5086602"/>
             <a:ext cx="5025836" cy="1867049"/>
           </a:xfrm>
           <a:prstGeom prst="rect">
@@ -4634,7 +4634,7 @@
         </p:nvSpPr>
         <p:spPr>
           <a:xfrm>
-            <a:off x="915442" y="7393448"/>
+            <a:off x="915442" y="7465478"/>
             <a:ext cx="7678281" cy="552227"/>
           </a:xfrm>
           <a:prstGeom prst="rect">
@@ -4762,7 +4762,7 @@
         </p:nvSpPr>
         <p:spPr>
           <a:xfrm>
-            <a:off x="3814048" y="5897555"/>
+            <a:off x="3814048" y="5836656"/>
             <a:ext cx="2658904" cy="304495"/>
           </a:xfrm>
           <a:prstGeom prst="rect">
@@ -4788,13 +4788,13 @@
               </a:spcAft>
             </a:pPr>
             <a:r>
-              <a:rPr b="0" i="0" sz="2397" lang="pt-BR">
+              <a:rPr b="1" i="0" sz="2397" lang="pt-BR">
                 <a:solidFill>
                   <a:srgbClr val="E9C46A"/>
                 </a:solidFill>
-                <a:latin typeface="Barlow SemiBold"/>
-                <a:ea typeface="Barlow SemiBold"/>
-                <a:cs typeface="Barlow SemiBold"/>
+                <a:latin typeface="Barlow"/>
+                <a:ea typeface="Barlow"/>
+                <a:cs typeface="Barlow"/>
               </a:rPr>
               <a:t>22 a 30 s · convite</a:t>
             </a:r>
@@ -4809,7 +4809,7 @@
         </p:nvSpPr>
         <p:spPr>
           <a:xfrm>
-            <a:off x="2669381" y="6666281"/>
+            <a:off x="2669381" y="6456714"/>
             <a:ext cx="4948238" cy="933524"/>
           </a:xfrm>
           <a:prstGeom prst="rect">
@@ -4856,7 +4856,7 @@
         </p:nvSpPr>
         <p:spPr>
           <a:xfrm>
-            <a:off x="2531872" y="8204135"/>
+            <a:off x="2531872" y="8105380"/>
             <a:ext cx="5223108" cy="493776"/>
           </a:xfrm>
           <a:prstGeom prst="rect">
